--- a/Project Management/ShiftPay-Status-Deck.pptx
+++ b/Project Management/ShiftPay-Status-Deck.pptx
@@ -5,12 +5,12 @@
     <p:sldMasterId id="2147483648" r:id="rId1"/>
   </p:sldMasterIdLst>
   <p:sldIdLst>
-    <p:sldId id="256" r:id="rId7"/>
-    <p:sldId id="257" r:id="rId8"/>
-    <p:sldId id="258" r:id="rId9"/>
-    <p:sldId id="259" r:id="rId10"/>
+    <p:sldId id="256" r:id="rId2"/>
+    <p:sldId id="257" r:id="rId3"/>
+    <p:sldId id="258" r:id="rId4"/>
+    <p:sldId id="259" r:id="rId5"/>
   </p:sldIdLst>
-  <p:sldSz cx="12191695" cy="6858000" type="screen4x3"/>
+  <p:sldSz cx="12192000" cy="6858000"/>
   <p:notesSz cx="6858000" cy="9144000"/>
   <p:defaultTextStyle>
     <a:defPPr>
@@ -107,6 +107,22 @@
       </a:defRPr>
     </a:lvl9pPr>
   </p:defaultTextStyle>
+  <p:extLst>
+    <p:ext uri="{EFAFB233-063F-42B5-8137-9DF3F51BA10A}">
+      <p15:sldGuideLst xmlns:p15="http://schemas.microsoft.com/office/powerpoint/2012/main">
+        <p15:guide id="1" orient="horz" pos="2160">
+          <p15:clr>
+            <a:srgbClr val="A4A3A4"/>
+          </p15:clr>
+        </p15:guide>
+        <p15:guide id="2" pos="2880">
+          <p15:clr>
+            <a:srgbClr val="A4A3A4"/>
+          </p15:clr>
+        </p15:guide>
+      </p15:sldGuideLst>
+    </p:ext>
+  </p:extLst>
 </p:presentation>
 </file>
 
@@ -148,10 +164,9 @@
           <a:lstStyle/>
           <a:p>
             <a:r>
-              <a:rPr lang="en-US" smtClean="0"/>
+              <a:rPr lang="en-US"/>
               <a:t>Click to edit Master title style</a:t>
             </a:r>
-            <a:endParaRPr lang="en-US"/>
           </a:p>
         </p:txBody>
       </p:sp>
@@ -267,10 +282,9 @@
           </a:lstStyle>
           <a:p>
             <a:r>
-              <a:rPr lang="en-US" smtClean="0"/>
+              <a:rPr lang="en-US"/>
               <a:t>Click to edit Master subtitle style</a:t>
             </a:r>
-            <a:endParaRPr lang="en-US"/>
           </a:p>
         </p:txBody>
       </p:sp>
@@ -291,7 +305,7 @@
           <a:p>
             <a:fld id="{5BCAD085-E8A6-8845-BD4E-CB4CCA059FC4}" type="datetimeFigureOut">
               <a:rPr lang="en-US" smtClean="0"/>
-              <a:t>1/27/13</a:t>
+              <a:t>9/7/2026</a:t>
             </a:fld>
             <a:endParaRPr lang="en-US"/>
           </a:p>
@@ -385,10 +399,9 @@
           <a:lstStyle/>
           <a:p>
             <a:r>
-              <a:rPr lang="en-US" smtClean="0"/>
+              <a:rPr lang="en-US"/>
               <a:t>Click to edit Master title style</a:t>
             </a:r>
-            <a:endParaRPr lang="en-US"/>
           </a:p>
         </p:txBody>
       </p:sp>
@@ -409,38 +422,37 @@
           <a:p>
             <a:pPr lvl="0"/>
             <a:r>
-              <a:rPr lang="en-US" smtClean="0"/>
+              <a:rPr lang="en-US"/>
               <a:t>Click to edit Master text styles</a:t>
             </a:r>
           </a:p>
           <a:p>
             <a:pPr lvl="1"/>
             <a:r>
-              <a:rPr lang="en-US" smtClean="0"/>
+              <a:rPr lang="en-US"/>
               <a:t>Second level</a:t>
             </a:r>
           </a:p>
           <a:p>
             <a:pPr lvl="2"/>
             <a:r>
-              <a:rPr lang="en-US" smtClean="0"/>
+              <a:rPr lang="en-US"/>
               <a:t>Third level</a:t>
             </a:r>
           </a:p>
           <a:p>
             <a:pPr lvl="3"/>
             <a:r>
-              <a:rPr lang="en-US" smtClean="0"/>
+              <a:rPr lang="en-US"/>
               <a:t>Fourth level</a:t>
             </a:r>
           </a:p>
           <a:p>
             <a:pPr lvl="4"/>
             <a:r>
-              <a:rPr lang="en-US" smtClean="0"/>
+              <a:rPr lang="en-US"/>
               <a:t>Fifth level</a:t>
             </a:r>
-            <a:endParaRPr lang="en-US"/>
           </a:p>
         </p:txBody>
       </p:sp>
@@ -461,7 +473,7 @@
           <a:p>
             <a:fld id="{5BCAD085-E8A6-8845-BD4E-CB4CCA059FC4}" type="datetimeFigureOut">
               <a:rPr lang="en-US" smtClean="0"/>
-              <a:t>1/27/13</a:t>
+              <a:t>9/7/2026</a:t>
             </a:fld>
             <a:endParaRPr lang="en-US"/>
           </a:p>
@@ -560,10 +572,9 @@
           <a:lstStyle/>
           <a:p>
             <a:r>
-              <a:rPr lang="en-US" smtClean="0"/>
+              <a:rPr lang="en-US"/>
               <a:t>Click to edit Master title style</a:t>
             </a:r>
-            <a:endParaRPr lang="en-US"/>
           </a:p>
         </p:txBody>
       </p:sp>
@@ -589,38 +600,37 @@
           <a:p>
             <a:pPr lvl="0"/>
             <a:r>
-              <a:rPr lang="en-US" smtClean="0"/>
+              <a:rPr lang="en-US"/>
               <a:t>Click to edit Master text styles</a:t>
             </a:r>
           </a:p>
           <a:p>
             <a:pPr lvl="1"/>
             <a:r>
-              <a:rPr lang="en-US" smtClean="0"/>
+              <a:rPr lang="en-US"/>
               <a:t>Second level</a:t>
             </a:r>
           </a:p>
           <a:p>
             <a:pPr lvl="2"/>
             <a:r>
-              <a:rPr lang="en-US" smtClean="0"/>
+              <a:rPr lang="en-US"/>
               <a:t>Third level</a:t>
             </a:r>
           </a:p>
           <a:p>
             <a:pPr lvl="3"/>
             <a:r>
-              <a:rPr lang="en-US" smtClean="0"/>
+              <a:rPr lang="en-US"/>
               <a:t>Fourth level</a:t>
             </a:r>
           </a:p>
           <a:p>
             <a:pPr lvl="4"/>
             <a:r>
-              <a:rPr lang="en-US" smtClean="0"/>
+              <a:rPr lang="en-US"/>
               <a:t>Fifth level</a:t>
             </a:r>
-            <a:endParaRPr lang="en-US"/>
           </a:p>
         </p:txBody>
       </p:sp>
@@ -641,7 +651,7 @@
           <a:p>
             <a:fld id="{5BCAD085-E8A6-8845-BD4E-CB4CCA059FC4}" type="datetimeFigureOut">
               <a:rPr lang="en-US" smtClean="0"/>
-              <a:t>1/27/13</a:t>
+              <a:t>9/7/2026</a:t>
             </a:fld>
             <a:endParaRPr lang="en-US"/>
           </a:p>
@@ -735,10 +745,9 @@
           <a:lstStyle/>
           <a:p>
             <a:r>
-              <a:rPr lang="en-US" smtClean="0"/>
+              <a:rPr lang="en-US"/>
               <a:t>Click to edit Master title style</a:t>
             </a:r>
-            <a:endParaRPr lang="en-US"/>
           </a:p>
         </p:txBody>
       </p:sp>
@@ -759,38 +768,37 @@
           <a:p>
             <a:pPr lvl="0"/>
             <a:r>
-              <a:rPr lang="en-US" smtClean="0"/>
+              <a:rPr lang="en-US"/>
               <a:t>Click to edit Master text styles</a:t>
             </a:r>
           </a:p>
           <a:p>
             <a:pPr lvl="1"/>
             <a:r>
-              <a:rPr lang="en-US" smtClean="0"/>
+              <a:rPr lang="en-US"/>
               <a:t>Second level</a:t>
             </a:r>
           </a:p>
           <a:p>
             <a:pPr lvl="2"/>
             <a:r>
-              <a:rPr lang="en-US" smtClean="0"/>
+              <a:rPr lang="en-US"/>
               <a:t>Third level</a:t>
             </a:r>
           </a:p>
           <a:p>
             <a:pPr lvl="3"/>
             <a:r>
-              <a:rPr lang="en-US" smtClean="0"/>
+              <a:rPr lang="en-US"/>
               <a:t>Fourth level</a:t>
             </a:r>
           </a:p>
           <a:p>
             <a:pPr lvl="4"/>
             <a:r>
-              <a:rPr lang="en-US" smtClean="0"/>
+              <a:rPr lang="en-US"/>
               <a:t>Fifth level</a:t>
             </a:r>
-            <a:endParaRPr lang="en-US"/>
           </a:p>
         </p:txBody>
       </p:sp>
@@ -811,7 +819,7 @@
           <a:p>
             <a:fld id="{5BCAD085-E8A6-8845-BD4E-CB4CCA059FC4}" type="datetimeFigureOut">
               <a:rPr lang="en-US" smtClean="0"/>
-              <a:t>1/27/13</a:t>
+              <a:t>9/7/2026</a:t>
             </a:fld>
             <a:endParaRPr lang="en-US"/>
           </a:p>
@@ -914,10 +922,9 @@
           </a:lstStyle>
           <a:p>
             <a:r>
-              <a:rPr lang="en-US" smtClean="0"/>
+              <a:rPr lang="en-US"/>
               <a:t>Click to edit Master title style</a:t>
             </a:r>
-            <a:endParaRPr lang="en-US"/>
           </a:p>
         </p:txBody>
       </p:sp>
@@ -1034,7 +1041,7 @@
           <a:p>
             <a:pPr lvl="0"/>
             <a:r>
-              <a:rPr lang="en-US" smtClean="0"/>
+              <a:rPr lang="en-US"/>
               <a:t>Click to edit Master text styles</a:t>
             </a:r>
           </a:p>
@@ -1057,7 +1064,7 @@
           <a:p>
             <a:fld id="{5BCAD085-E8A6-8845-BD4E-CB4CCA059FC4}" type="datetimeFigureOut">
               <a:rPr lang="en-US" smtClean="0"/>
-              <a:t>1/27/13</a:t>
+              <a:t>9/7/2026</a:t>
             </a:fld>
             <a:endParaRPr lang="en-US"/>
           </a:p>
@@ -1151,10 +1158,9 @@
           <a:lstStyle/>
           <a:p>
             <a:r>
-              <a:rPr lang="en-US" smtClean="0"/>
+              <a:rPr lang="en-US"/>
               <a:t>Click to edit Master title style</a:t>
             </a:r>
-            <a:endParaRPr lang="en-US"/>
           </a:p>
         </p:txBody>
       </p:sp>
@@ -1208,38 +1214,37 @@
           <a:p>
             <a:pPr lvl="0"/>
             <a:r>
-              <a:rPr lang="en-US" smtClean="0"/>
+              <a:rPr lang="en-US"/>
               <a:t>Click to edit Master text styles</a:t>
             </a:r>
           </a:p>
           <a:p>
             <a:pPr lvl="1"/>
             <a:r>
-              <a:rPr lang="en-US" smtClean="0"/>
+              <a:rPr lang="en-US"/>
               <a:t>Second level</a:t>
             </a:r>
           </a:p>
           <a:p>
             <a:pPr lvl="2"/>
             <a:r>
-              <a:rPr lang="en-US" smtClean="0"/>
+              <a:rPr lang="en-US"/>
               <a:t>Third level</a:t>
             </a:r>
           </a:p>
           <a:p>
             <a:pPr lvl="3"/>
             <a:r>
-              <a:rPr lang="en-US" smtClean="0"/>
+              <a:rPr lang="en-US"/>
               <a:t>Fourth level</a:t>
             </a:r>
           </a:p>
           <a:p>
             <a:pPr lvl="4"/>
             <a:r>
-              <a:rPr lang="en-US" smtClean="0"/>
+              <a:rPr lang="en-US"/>
               <a:t>Fifth level</a:t>
             </a:r>
-            <a:endParaRPr lang="en-US"/>
           </a:p>
         </p:txBody>
       </p:sp>
@@ -1293,38 +1298,37 @@
           <a:p>
             <a:pPr lvl="0"/>
             <a:r>
-              <a:rPr lang="en-US" smtClean="0"/>
+              <a:rPr lang="en-US"/>
               <a:t>Click to edit Master text styles</a:t>
             </a:r>
           </a:p>
           <a:p>
             <a:pPr lvl="1"/>
             <a:r>
-              <a:rPr lang="en-US" smtClean="0"/>
+              <a:rPr lang="en-US"/>
               <a:t>Second level</a:t>
             </a:r>
           </a:p>
           <a:p>
             <a:pPr lvl="2"/>
             <a:r>
-              <a:rPr lang="en-US" smtClean="0"/>
+              <a:rPr lang="en-US"/>
               <a:t>Third level</a:t>
             </a:r>
           </a:p>
           <a:p>
             <a:pPr lvl="3"/>
             <a:r>
-              <a:rPr lang="en-US" smtClean="0"/>
+              <a:rPr lang="en-US"/>
               <a:t>Fourth level</a:t>
             </a:r>
           </a:p>
           <a:p>
             <a:pPr lvl="4"/>
             <a:r>
-              <a:rPr lang="en-US" smtClean="0"/>
+              <a:rPr lang="en-US"/>
               <a:t>Fifth level</a:t>
             </a:r>
-            <a:endParaRPr lang="en-US"/>
           </a:p>
         </p:txBody>
       </p:sp>
@@ -1345,7 +1349,7 @@
           <a:p>
             <a:fld id="{5BCAD085-E8A6-8845-BD4E-CB4CCA059FC4}" type="datetimeFigureOut">
               <a:rPr lang="en-US" smtClean="0"/>
-              <a:t>1/27/13</a:t>
+              <a:t>9/7/2026</a:t>
             </a:fld>
             <a:endParaRPr lang="en-US"/>
           </a:p>
@@ -1443,10 +1447,9 @@
           </a:lstStyle>
           <a:p>
             <a:r>
-              <a:rPr lang="en-US" smtClean="0"/>
+              <a:rPr lang="en-US"/>
               <a:t>Click to edit Master title style</a:t>
             </a:r>
-            <a:endParaRPr lang="en-US"/>
           </a:p>
         </p:txBody>
       </p:sp>
@@ -1509,7 +1512,7 @@
           <a:p>
             <a:pPr lvl="0"/>
             <a:r>
-              <a:rPr lang="en-US" smtClean="0"/>
+              <a:rPr lang="en-US"/>
               <a:t>Click to edit Master text styles</a:t>
             </a:r>
           </a:p>
@@ -1565,38 +1568,37 @@
           <a:p>
             <a:pPr lvl="0"/>
             <a:r>
-              <a:rPr lang="en-US" smtClean="0"/>
+              <a:rPr lang="en-US"/>
               <a:t>Click to edit Master text styles</a:t>
             </a:r>
           </a:p>
           <a:p>
             <a:pPr lvl="1"/>
             <a:r>
-              <a:rPr lang="en-US" smtClean="0"/>
+              <a:rPr lang="en-US"/>
               <a:t>Second level</a:t>
             </a:r>
           </a:p>
           <a:p>
             <a:pPr lvl="2"/>
             <a:r>
-              <a:rPr lang="en-US" smtClean="0"/>
+              <a:rPr lang="en-US"/>
               <a:t>Third level</a:t>
             </a:r>
           </a:p>
           <a:p>
             <a:pPr lvl="3"/>
             <a:r>
-              <a:rPr lang="en-US" smtClean="0"/>
+              <a:rPr lang="en-US"/>
               <a:t>Fourth level</a:t>
             </a:r>
           </a:p>
           <a:p>
             <a:pPr lvl="4"/>
             <a:r>
-              <a:rPr lang="en-US" smtClean="0"/>
+              <a:rPr lang="en-US"/>
               <a:t>Fifth level</a:t>
             </a:r>
-            <a:endParaRPr lang="en-US"/>
           </a:p>
         </p:txBody>
       </p:sp>
@@ -1659,7 +1661,7 @@
           <a:p>
             <a:pPr lvl="0"/>
             <a:r>
-              <a:rPr lang="en-US" smtClean="0"/>
+              <a:rPr lang="en-US"/>
               <a:t>Click to edit Master text styles</a:t>
             </a:r>
           </a:p>
@@ -1715,38 +1717,37 @@
           <a:p>
             <a:pPr lvl="0"/>
             <a:r>
-              <a:rPr lang="en-US" smtClean="0"/>
+              <a:rPr lang="en-US"/>
               <a:t>Click to edit Master text styles</a:t>
             </a:r>
           </a:p>
           <a:p>
             <a:pPr lvl="1"/>
             <a:r>
-              <a:rPr lang="en-US" smtClean="0"/>
+              <a:rPr lang="en-US"/>
               <a:t>Second level</a:t>
             </a:r>
           </a:p>
           <a:p>
             <a:pPr lvl="2"/>
             <a:r>
-              <a:rPr lang="en-US" smtClean="0"/>
+              <a:rPr lang="en-US"/>
               <a:t>Third level</a:t>
             </a:r>
           </a:p>
           <a:p>
             <a:pPr lvl="3"/>
             <a:r>
-              <a:rPr lang="en-US" smtClean="0"/>
+              <a:rPr lang="en-US"/>
               <a:t>Fourth level</a:t>
             </a:r>
           </a:p>
           <a:p>
             <a:pPr lvl="4"/>
             <a:r>
-              <a:rPr lang="en-US" smtClean="0"/>
+              <a:rPr lang="en-US"/>
               <a:t>Fifth level</a:t>
             </a:r>
-            <a:endParaRPr lang="en-US"/>
           </a:p>
         </p:txBody>
       </p:sp>
@@ -1767,7 +1768,7 @@
           <a:p>
             <a:fld id="{5BCAD085-E8A6-8845-BD4E-CB4CCA059FC4}" type="datetimeFigureOut">
               <a:rPr lang="en-US" smtClean="0"/>
-              <a:t>1/27/13</a:t>
+              <a:t>9/7/2026</a:t>
             </a:fld>
             <a:endParaRPr lang="en-US"/>
           </a:p>
@@ -1861,10 +1862,9 @@
           <a:lstStyle/>
           <a:p>
             <a:r>
-              <a:rPr lang="en-US" smtClean="0"/>
+              <a:rPr lang="en-US"/>
               <a:t>Click to edit Master title style</a:t>
             </a:r>
-            <a:endParaRPr lang="en-US"/>
           </a:p>
         </p:txBody>
       </p:sp>
@@ -1885,7 +1885,7 @@
           <a:p>
             <a:fld id="{5BCAD085-E8A6-8845-BD4E-CB4CCA059FC4}" type="datetimeFigureOut">
               <a:rPr lang="en-US" smtClean="0"/>
-              <a:t>1/27/13</a:t>
+              <a:t>9/7/2026</a:t>
             </a:fld>
             <a:endParaRPr lang="en-US"/>
           </a:p>
@@ -1980,7 +1980,7 @@
           <a:p>
             <a:fld id="{5BCAD085-E8A6-8845-BD4E-CB4CCA059FC4}" type="datetimeFigureOut">
               <a:rPr lang="en-US" smtClean="0"/>
-              <a:t>1/27/13</a:t>
+              <a:t>9/7/2026</a:t>
             </a:fld>
             <a:endParaRPr lang="en-US"/>
           </a:p>
@@ -2083,10 +2083,9 @@
           </a:lstStyle>
           <a:p>
             <a:r>
-              <a:rPr lang="en-US" smtClean="0"/>
+              <a:rPr lang="en-US"/>
               <a:t>Click to edit Master title style</a:t>
             </a:r>
-            <a:endParaRPr lang="en-US"/>
           </a:p>
         </p:txBody>
       </p:sp>
@@ -2140,38 +2139,37 @@
           <a:p>
             <a:pPr lvl="0"/>
             <a:r>
-              <a:rPr lang="en-US" smtClean="0"/>
+              <a:rPr lang="en-US"/>
               <a:t>Click to edit Master text styles</a:t>
             </a:r>
           </a:p>
           <a:p>
             <a:pPr lvl="1"/>
             <a:r>
-              <a:rPr lang="en-US" smtClean="0"/>
+              <a:rPr lang="en-US"/>
               <a:t>Second level</a:t>
             </a:r>
           </a:p>
           <a:p>
             <a:pPr lvl="2"/>
             <a:r>
-              <a:rPr lang="en-US" smtClean="0"/>
+              <a:rPr lang="en-US"/>
               <a:t>Third level</a:t>
             </a:r>
           </a:p>
           <a:p>
             <a:pPr lvl="3"/>
             <a:r>
-              <a:rPr lang="en-US" smtClean="0"/>
+              <a:rPr lang="en-US"/>
               <a:t>Fourth level</a:t>
             </a:r>
           </a:p>
           <a:p>
             <a:pPr lvl="4"/>
             <a:r>
-              <a:rPr lang="en-US" smtClean="0"/>
+              <a:rPr lang="en-US"/>
               <a:t>Fifth level</a:t>
             </a:r>
-            <a:endParaRPr lang="en-US"/>
           </a:p>
         </p:txBody>
       </p:sp>
@@ -2234,7 +2232,7 @@
           <a:p>
             <a:pPr lvl="0"/>
             <a:r>
-              <a:rPr lang="en-US" smtClean="0"/>
+              <a:rPr lang="en-US"/>
               <a:t>Click to edit Master text styles</a:t>
             </a:r>
           </a:p>
@@ -2257,7 +2255,7 @@
           <a:p>
             <a:fld id="{5BCAD085-E8A6-8845-BD4E-CB4CCA059FC4}" type="datetimeFigureOut">
               <a:rPr lang="en-US" smtClean="0"/>
-              <a:t>1/27/13</a:t>
+              <a:t>9/7/2026</a:t>
             </a:fld>
             <a:endParaRPr lang="en-US"/>
           </a:p>
@@ -2360,10 +2358,9 @@
           </a:lstStyle>
           <a:p>
             <a:r>
-              <a:rPr lang="en-US" smtClean="0"/>
+              <a:rPr lang="en-US"/>
               <a:t>Click to edit Master title style</a:t>
             </a:r>
-            <a:endParaRPr lang="en-US"/>
           </a:p>
         </p:txBody>
       </p:sp>
@@ -2487,7 +2484,7 @@
           <a:p>
             <a:pPr lvl="0"/>
             <a:r>
-              <a:rPr lang="en-US" smtClean="0"/>
+              <a:rPr lang="en-US"/>
               <a:t>Click to edit Master text styles</a:t>
             </a:r>
           </a:p>
@@ -2510,7 +2507,7 @@
           <a:p>
             <a:fld id="{5BCAD085-E8A6-8845-BD4E-CB4CCA059FC4}" type="datetimeFigureOut">
               <a:rPr lang="en-US" smtClean="0"/>
-              <a:t>1/27/13</a:t>
+              <a:t>9/7/2026</a:t>
             </a:fld>
             <a:endParaRPr lang="en-US"/>
           </a:p>
@@ -2619,10 +2616,9 @@
           <a:lstStyle/>
           <a:p>
             <a:r>
-              <a:rPr lang="en-US" smtClean="0"/>
+              <a:rPr lang="en-US"/>
               <a:t>Click to edit Master title style</a:t>
             </a:r>
-            <a:endParaRPr lang="en-US"/>
           </a:p>
         </p:txBody>
       </p:sp>
@@ -2653,38 +2649,37 @@
           <a:p>
             <a:pPr lvl="0"/>
             <a:r>
-              <a:rPr lang="en-US" smtClean="0"/>
+              <a:rPr lang="en-US"/>
               <a:t>Click to edit Master text styles</a:t>
             </a:r>
           </a:p>
           <a:p>
             <a:pPr lvl="1"/>
             <a:r>
-              <a:rPr lang="en-US" smtClean="0"/>
+              <a:rPr lang="en-US"/>
               <a:t>Second level</a:t>
             </a:r>
           </a:p>
           <a:p>
             <a:pPr lvl="2"/>
             <a:r>
-              <a:rPr lang="en-US" smtClean="0"/>
+              <a:rPr lang="en-US"/>
               <a:t>Third level</a:t>
             </a:r>
           </a:p>
           <a:p>
             <a:pPr lvl="3"/>
             <a:r>
-              <a:rPr lang="en-US" smtClean="0"/>
+              <a:rPr lang="en-US"/>
               <a:t>Fourth level</a:t>
             </a:r>
           </a:p>
           <a:p>
             <a:pPr lvl="4"/>
             <a:r>
-              <a:rPr lang="en-US" smtClean="0"/>
+              <a:rPr lang="en-US"/>
               <a:t>Fifth level</a:t>
             </a:r>
-            <a:endParaRPr lang="en-US"/>
           </a:p>
         </p:txBody>
       </p:sp>
@@ -2723,7 +2718,7 @@
           <a:p>
             <a:fld id="{5BCAD085-E8A6-8845-BD4E-CB4CCA059FC4}" type="datetimeFigureOut">
               <a:rPr lang="en-US" smtClean="0"/>
-              <a:t>1/27/13</a:t>
+              <a:t>9/7/2026</a:t>
             </a:fld>
             <a:endParaRPr lang="en-US"/>
           </a:p>
@@ -3082,7 +3077,7 @@
 </file>
 
 <file path=ppt/slides/slide1.xml><?xml version="1.0" encoding="utf-8"?>
-<p:sld xmlns:a="http://schemas.openxmlformats.org/drawingml/2006/main" xmlns:p="http://schemas.openxmlformats.org/presentationml/2006/main" xmlns:r="http://schemas.openxmlformats.org/officeDocument/2006/relationships">
+<p:sld xmlns:a="http://schemas.openxmlformats.org/drawingml/2006/main" xmlns:r="http://schemas.openxmlformats.org/officeDocument/2006/relationships" xmlns:p="http://schemas.openxmlformats.org/presentationml/2006/main">
   <p:cSld>
     <p:spTree>
       <p:nvGrpSpPr>
@@ -3090,7 +3085,14 @@
         <p:cNvGrpSpPr/>
         <p:nvPr/>
       </p:nvGrpSpPr>
-      <p:grpSpPr/>
+      <p:grpSpPr>
+        <a:xfrm>
+          <a:off x="0" y="0"/>
+          <a:ext cx="0" cy="0"/>
+          <a:chOff x="0" y="0"/>
+          <a:chExt cx="0" cy="0"/>
+        </a:xfrm>
+      </p:grpSpPr>
       <p:sp>
         <p:nvSpPr>
           <p:cNvPr id="2" name="Rectangle 1"/>
@@ -3132,6 +3134,7 @@
           <a:lstStyle/>
           <a:p>
             <a:pPr algn="ctr"/>
+            <a:endParaRPr/>
           </a:p>
         </p:txBody>
       </p:sp>
@@ -3152,7 +3155,7 @@
           <a:noFill/>
         </p:spPr>
         <p:txBody>
-          <a:bodyPr wrap="square" anchor="t" lIns="0" rIns="0" tIns="0" bIns="0">
+          <a:bodyPr wrap="square" lIns="0" tIns="0" rIns="0" bIns="0" anchor="t">
             <a:spAutoFit/>
           </a:bodyPr>
           <a:lstStyle/>
@@ -3191,7 +3194,7 @@
           <a:noFill/>
         </p:spPr>
         <p:txBody>
-          <a:bodyPr wrap="square" anchor="t" lIns="0" rIns="0" tIns="0" bIns="0">
+          <a:bodyPr wrap="square" lIns="0" tIns="0" rIns="0" bIns="0" anchor="t">
             <a:spAutoFit/>
           </a:bodyPr>
           <a:lstStyle/>
@@ -3254,6 +3257,7 @@
           <a:lstStyle/>
           <a:p>
             <a:pPr algn="ctr"/>
+            <a:endParaRPr/>
           </a:p>
         </p:txBody>
       </p:sp>
@@ -3274,7 +3278,7 @@
           <a:noFill/>
         </p:spPr>
         <p:txBody>
-          <a:bodyPr wrap="square" anchor="t" lIns="0" rIns="0" tIns="0" bIns="0">
+          <a:bodyPr wrap="square" lIns="0" tIns="0" rIns="0" bIns="0" anchor="t">
             <a:spAutoFit/>
           </a:bodyPr>
           <a:lstStyle/>
@@ -3337,6 +3341,7 @@
           <a:lstStyle/>
           <a:p>
             <a:pPr algn="ctr"/>
+            <a:endParaRPr/>
           </a:p>
         </p:txBody>
       </p:sp>
@@ -3357,7 +3362,7 @@
           <a:noFill/>
         </p:spPr>
         <p:txBody>
-          <a:bodyPr wrap="square" anchor="t" lIns="0" rIns="0" tIns="0" bIns="0">
+          <a:bodyPr wrap="square" lIns="0" tIns="0" rIns="0" bIns="0" anchor="t">
             <a:spAutoFit/>
           </a:bodyPr>
           <a:lstStyle/>
@@ -3396,7 +3401,7 @@
           <a:noFill/>
         </p:spPr>
         <p:txBody>
-          <a:bodyPr wrap="square" anchor="t" lIns="0" rIns="0" tIns="0" bIns="0">
+          <a:bodyPr wrap="square" lIns="0" tIns="0" rIns="0" bIns="0" anchor="t">
             <a:spAutoFit/>
           </a:bodyPr>
           <a:lstStyle/>
@@ -3459,6 +3464,7 @@
           <a:lstStyle/>
           <a:p>
             <a:pPr algn="ctr"/>
+            <a:endParaRPr/>
           </a:p>
         </p:txBody>
       </p:sp>
@@ -3479,7 +3485,7 @@
           <a:noFill/>
         </p:spPr>
         <p:txBody>
-          <a:bodyPr wrap="square" anchor="t" lIns="0" rIns="0" tIns="0" bIns="0">
+          <a:bodyPr wrap="square" lIns="0" tIns="0" rIns="0" bIns="0" anchor="t">
             <a:spAutoFit/>
           </a:bodyPr>
           <a:lstStyle/>
@@ -3518,7 +3524,7 @@
           <a:noFill/>
         </p:spPr>
         <p:txBody>
-          <a:bodyPr wrap="square" anchor="t" lIns="0" rIns="0" tIns="0" bIns="0">
+          <a:bodyPr wrap="square" lIns="0" tIns="0" rIns="0" bIns="0" anchor="t">
             <a:spAutoFit/>
           </a:bodyPr>
           <a:lstStyle/>
@@ -3581,6 +3587,7 @@
           <a:lstStyle/>
           <a:p>
             <a:pPr algn="ctr"/>
+            <a:endParaRPr/>
           </a:p>
         </p:txBody>
       </p:sp>
@@ -3601,7 +3608,7 @@
           <a:noFill/>
         </p:spPr>
         <p:txBody>
-          <a:bodyPr wrap="square" anchor="t" lIns="0" rIns="0" tIns="0" bIns="0">
+          <a:bodyPr wrap="square" lIns="0" tIns="0" rIns="0" bIns="0" anchor="t">
             <a:spAutoFit/>
           </a:bodyPr>
           <a:lstStyle/>
@@ -3640,7 +3647,7 @@
           <a:noFill/>
         </p:spPr>
         <p:txBody>
-          <a:bodyPr wrap="square" anchor="t" lIns="0" rIns="0" tIns="0" bIns="0">
+          <a:bodyPr wrap="square" lIns="0" tIns="0" rIns="0" bIns="0" anchor="t">
             <a:spAutoFit/>
           </a:bodyPr>
           <a:lstStyle/>
@@ -3703,6 +3710,7 @@
           <a:lstStyle/>
           <a:p>
             <a:pPr algn="ctr"/>
+            <a:endParaRPr/>
           </a:p>
         </p:txBody>
       </p:sp>
@@ -3723,7 +3731,7 @@
           <a:noFill/>
         </p:spPr>
         <p:txBody>
-          <a:bodyPr wrap="square" anchor="t" lIns="0" rIns="0" tIns="0" bIns="0">
+          <a:bodyPr wrap="square" lIns="0" tIns="0" rIns="0" bIns="0" anchor="t">
             <a:spAutoFit/>
           </a:bodyPr>
           <a:lstStyle/>
@@ -3762,7 +3770,7 @@
           <a:noFill/>
         </p:spPr>
         <p:txBody>
-          <a:bodyPr wrap="square" anchor="t" lIns="0" rIns="0" tIns="0" bIns="0">
+          <a:bodyPr wrap="square" lIns="0" tIns="0" rIns="0" bIns="0" anchor="t">
             <a:spAutoFit/>
           </a:bodyPr>
           <a:lstStyle/>
@@ -3801,7 +3809,7 @@
           <a:noFill/>
         </p:spPr>
         <p:txBody>
-          <a:bodyPr wrap="square" anchor="t" lIns="0" rIns="0" tIns="0" bIns="0">
+          <a:bodyPr wrap="square" lIns="0" tIns="0" rIns="0" bIns="0" anchor="t">
             <a:spAutoFit/>
           </a:bodyPr>
           <a:lstStyle/>
@@ -3928,6 +3936,7 @@
           <a:lstStyle/>
           <a:p>
             <a:pPr algn="ctr"/>
+            <a:endParaRPr/>
           </a:p>
         </p:txBody>
       </p:sp>
@@ -3940,7 +3949,7 @@
         <p:spPr>
           <a:xfrm>
             <a:off x="6748272" y="3429000"/>
-            <a:ext cx="4572000" cy="274320"/>
+            <a:ext cx="4572000" cy="2659702"/>
           </a:xfrm>
           <a:prstGeom prst="rect">
             <a:avLst/>
@@ -3948,7 +3957,7 @@
           <a:noFill/>
         </p:spPr>
         <p:txBody>
-          <a:bodyPr wrap="square" anchor="t" lIns="0" rIns="0" tIns="0" bIns="0">
+          <a:bodyPr wrap="square" lIns="0" tIns="0" rIns="0" bIns="0" anchor="t">
             <a:spAutoFit/>
           </a:bodyPr>
           <a:lstStyle/>
@@ -3959,7 +3968,7 @@
               </a:spcAft>
             </a:pPr>
             <a:r>
-              <a:rPr sz="1200" b="1">
+              <a:rPr sz="1200" b="1" dirty="0">
                 <a:solidFill>
                   <a:srgbClr val="003654"/>
                 </a:solidFill>
@@ -3975,13 +3984,31 @@
               </a:spcAft>
             </a:pPr>
             <a:r>
-              <a:rPr sz="1050" b="1">
+              <a:rPr sz="1050" b="1" dirty="0">
                 <a:solidFill>
                   <a:srgbClr val="1A1A1A"/>
                 </a:solidFill>
                 <a:latin typeface="Calibri"/>
               </a:rPr>
-              <a:t>Geetha Nallamada  ·  Sr Data Analyst</a:t>
+              <a:t>Geetha </a:t>
+            </a:r>
+            <a:r>
+              <a:rPr sz="1050" b="1" dirty="0" err="1">
+                <a:solidFill>
+                  <a:srgbClr val="1A1A1A"/>
+                </a:solidFill>
+                <a:latin typeface="Calibri"/>
+              </a:rPr>
+              <a:t>Nallamada</a:t>
+            </a:r>
+            <a:r>
+              <a:rPr sz="1050" b="1" dirty="0">
+                <a:solidFill>
+                  <a:srgbClr val="1A1A1A"/>
+                </a:solidFill>
+                <a:latin typeface="Calibri"/>
+              </a:rPr>
+              <a:t>  ·  Sr Data Analyst</a:t>
             </a:r>
           </a:p>
           <a:p>
@@ -3991,7 +4018,7 @@
               </a:spcAft>
             </a:pPr>
             <a:r>
-              <a:rPr sz="950" b="0">
+              <a:rPr sz="950" b="0" dirty="0">
                 <a:solidFill>
                   <a:srgbClr val="606676"/>
                 </a:solidFill>
@@ -4007,7 +4034,7 @@
               </a:spcAft>
             </a:pPr>
             <a:r>
-              <a:rPr sz="1050" b="1">
+              <a:rPr sz="1050" b="1" dirty="0">
                 <a:solidFill>
                   <a:srgbClr val="1A1A1A"/>
                 </a:solidFill>
@@ -4023,7 +4050,7 @@
               </a:spcAft>
             </a:pPr>
             <a:r>
-              <a:rPr sz="950" b="0">
+              <a:rPr sz="950" b="0" dirty="0">
                 <a:solidFill>
                   <a:srgbClr val="606676"/>
                 </a:solidFill>
@@ -4039,7 +4066,7 @@
               </a:spcAft>
             </a:pPr>
             <a:r>
-              <a:rPr sz="1050" b="1">
+              <a:rPr sz="1050" b="1" dirty="0">
                 <a:solidFill>
                   <a:srgbClr val="1A1A1A"/>
                 </a:solidFill>
@@ -4055,7 +4082,7 @@
               </a:spcAft>
             </a:pPr>
             <a:r>
-              <a:rPr sz="950" b="0">
+              <a:rPr sz="950" b="0" dirty="0">
                 <a:solidFill>
                   <a:srgbClr val="606676"/>
                 </a:solidFill>
@@ -4071,7 +4098,7 @@
               </a:spcAft>
             </a:pPr>
             <a:r>
-              <a:rPr sz="1050" b="1">
+              <a:rPr sz="1050" b="1" dirty="0">
                 <a:solidFill>
                   <a:srgbClr val="1A1A1A"/>
                 </a:solidFill>
@@ -4087,7 +4114,7 @@
               </a:spcAft>
             </a:pPr>
             <a:r>
-              <a:rPr sz="950" b="0">
+              <a:rPr sz="950" b="0" dirty="0">
                 <a:solidFill>
                   <a:srgbClr val="606676"/>
                 </a:solidFill>
@@ -4103,7 +4130,7 @@
               </a:spcAft>
             </a:pPr>
             <a:r>
-              <a:rPr sz="1050" b="1">
+              <a:rPr sz="1050" b="1" dirty="0">
                 <a:solidFill>
                   <a:srgbClr val="1A1A1A"/>
                 </a:solidFill>
@@ -4119,7 +4146,7 @@
               </a:spcAft>
             </a:pPr>
             <a:r>
-              <a:rPr sz="950" b="0">
+              <a:rPr sz="950" b="0" dirty="0">
                 <a:solidFill>
                   <a:srgbClr val="606676"/>
                 </a:solidFill>
@@ -4135,13 +4162,22 @@
               </a:spcAft>
             </a:pPr>
             <a:r>
-              <a:rPr sz="1050" b="1">
+              <a:rPr sz="1050" b="1" dirty="0" err="1">
                 <a:solidFill>
                   <a:srgbClr val="1A1A1A"/>
                 </a:solidFill>
                 <a:latin typeface="Calibri"/>
               </a:rPr>
-              <a:t>Swopneel  ·  SDET</a:t>
+              <a:t>Swopneel</a:t>
+            </a:r>
+            <a:r>
+              <a:rPr sz="1050" b="1" dirty="0">
+                <a:solidFill>
+                  <a:srgbClr val="1A1A1A"/>
+                </a:solidFill>
+                <a:latin typeface="Calibri"/>
+              </a:rPr>
+              <a:t>  ·  SDET</a:t>
             </a:r>
           </a:p>
           <a:p>
@@ -4151,13 +4187,13 @@
               </a:spcAft>
             </a:pPr>
             <a:r>
-              <a:rPr sz="950" b="0">
+              <a:rPr sz="950" b="0" dirty="0">
                 <a:solidFill>
                   <a:srgbClr val="606676"/>
                 </a:solidFill>
                 <a:latin typeface="Calibri"/>
               </a:rPr>
-              <a:t>Harness, CI and contract tests · 1 May – 25 Aug</a:t>
+              <a:t>Harness, CI and contract tests </a:t>
             </a:r>
           </a:p>
         </p:txBody>
@@ -4179,7 +4215,7 @@
           <a:noFill/>
         </p:spPr>
         <p:txBody>
-          <a:bodyPr wrap="square" anchor="t" lIns="0" rIns="0" tIns="0" bIns="0">
+          <a:bodyPr wrap="square" lIns="0" tIns="0" rIns="0" bIns="0" anchor="t">
             <a:spAutoFit/>
           </a:bodyPr>
           <a:lstStyle/>
@@ -4218,7 +4254,7 @@
           <a:noFill/>
         </p:spPr>
         <p:txBody>
-          <a:bodyPr wrap="square" anchor="t" lIns="0" rIns="0" tIns="0" bIns="0">
+          <a:bodyPr wrap="square" lIns="0" tIns="0" rIns="0" bIns="0" anchor="t">
             <a:spAutoFit/>
           </a:bodyPr>
           <a:lstStyle/>
@@ -4249,7 +4285,7 @@
 </file>
 
 <file path=ppt/slides/slide2.xml><?xml version="1.0" encoding="utf-8"?>
-<p:sld xmlns:a="http://schemas.openxmlformats.org/drawingml/2006/main" xmlns:p="http://schemas.openxmlformats.org/presentationml/2006/main" xmlns:r="http://schemas.openxmlformats.org/officeDocument/2006/relationships">
+<p:sld xmlns:a="http://schemas.openxmlformats.org/drawingml/2006/main" xmlns:r="http://schemas.openxmlformats.org/officeDocument/2006/relationships" xmlns:p="http://schemas.openxmlformats.org/presentationml/2006/main">
   <p:cSld>
     <p:spTree>
       <p:nvGrpSpPr>
@@ -4257,7 +4293,14 @@
         <p:cNvGrpSpPr/>
         <p:nvPr/>
       </p:nvGrpSpPr>
-      <p:grpSpPr/>
+      <p:grpSpPr>
+        <a:xfrm>
+          <a:off x="0" y="0"/>
+          <a:ext cx="0" cy="0"/>
+          <a:chOff x="0" y="0"/>
+          <a:chExt cx="0" cy="0"/>
+        </a:xfrm>
+      </p:grpSpPr>
       <p:sp>
         <p:nvSpPr>
           <p:cNvPr id="2" name="Rectangle 1"/>
@@ -4299,6 +4342,7 @@
           <a:lstStyle/>
           <a:p>
             <a:pPr algn="ctr"/>
+            <a:endParaRPr/>
           </a:p>
         </p:txBody>
       </p:sp>
@@ -4319,7 +4363,7 @@
           <a:noFill/>
         </p:spPr>
         <p:txBody>
-          <a:bodyPr wrap="square" anchor="t" lIns="0" rIns="0" tIns="0" bIns="0">
+          <a:bodyPr wrap="square" lIns="0" tIns="0" rIns="0" bIns="0" anchor="t">
             <a:spAutoFit/>
           </a:bodyPr>
           <a:lstStyle/>
@@ -4358,7 +4402,7 @@
           <a:noFill/>
         </p:spPr>
         <p:txBody>
-          <a:bodyPr wrap="square" anchor="t" lIns="0" rIns="0" tIns="0" bIns="0">
+          <a:bodyPr wrap="square" lIns="0" tIns="0" rIns="0" bIns="0" anchor="t">
             <a:spAutoFit/>
           </a:bodyPr>
           <a:lstStyle/>
@@ -4421,6 +4465,7 @@
           <a:lstStyle/>
           <a:p>
             <a:pPr algn="ctr"/>
+            <a:endParaRPr/>
           </a:p>
         </p:txBody>
       </p:sp>
@@ -4441,7 +4486,7 @@
           <a:noFill/>
         </p:spPr>
         <p:txBody>
-          <a:bodyPr wrap="square" anchor="t" lIns="0" rIns="0" tIns="0" bIns="0">
+          <a:bodyPr wrap="square" lIns="0" tIns="0" rIns="0" bIns="0" anchor="t">
             <a:spAutoFit/>
           </a:bodyPr>
           <a:lstStyle/>
@@ -4504,6 +4549,7 @@
           <a:lstStyle/>
           <a:p>
             <a:pPr algn="ctr"/>
+            <a:endParaRPr/>
           </a:p>
         </p:txBody>
       </p:sp>
@@ -4548,6 +4594,7 @@
           <a:lstStyle/>
           <a:p>
             <a:pPr algn="ctr"/>
+            <a:endParaRPr/>
           </a:p>
         </p:txBody>
       </p:sp>
@@ -4568,7 +4615,7 @@
           <a:noFill/>
         </p:spPr>
         <p:txBody>
-          <a:bodyPr wrap="square" anchor="t" lIns="0" rIns="0" tIns="0" bIns="0">
+          <a:bodyPr wrap="square" lIns="0" tIns="0" rIns="0" bIns="0" anchor="t">
             <a:spAutoFit/>
           </a:bodyPr>
           <a:lstStyle/>
@@ -4607,7 +4654,7 @@
           <a:noFill/>
         </p:spPr>
         <p:txBody>
-          <a:bodyPr wrap="square" anchor="t" lIns="0" rIns="0" tIns="0" bIns="0">
+          <a:bodyPr wrap="square" lIns="0" tIns="0" rIns="0" bIns="0" anchor="t">
             <a:spAutoFit/>
           </a:bodyPr>
           <a:lstStyle/>
@@ -4646,7 +4693,7 @@
           <a:noFill/>
         </p:spPr>
         <p:txBody>
-          <a:bodyPr wrap="square" anchor="t" lIns="0" rIns="0" tIns="0" bIns="0">
+          <a:bodyPr wrap="square" lIns="0" tIns="0" rIns="0" bIns="0" anchor="t">
             <a:spAutoFit/>
           </a:bodyPr>
           <a:lstStyle/>
@@ -4685,7 +4732,7 @@
           <a:noFill/>
         </p:spPr>
         <p:txBody>
-          <a:bodyPr wrap="square" anchor="t" lIns="0" rIns="0" tIns="0" bIns="0">
+          <a:bodyPr wrap="square" lIns="0" tIns="0" rIns="0" bIns="0" anchor="t">
             <a:spAutoFit/>
           </a:bodyPr>
           <a:lstStyle/>
@@ -4748,6 +4795,7 @@
           <a:lstStyle/>
           <a:p>
             <a:pPr algn="ctr"/>
+            <a:endParaRPr/>
           </a:p>
         </p:txBody>
       </p:sp>
@@ -4792,6 +4840,7 @@
           <a:lstStyle/>
           <a:p>
             <a:pPr algn="ctr"/>
+            <a:endParaRPr/>
           </a:p>
         </p:txBody>
       </p:sp>
@@ -4812,7 +4861,7 @@
           <a:noFill/>
         </p:spPr>
         <p:txBody>
-          <a:bodyPr wrap="square" anchor="t" lIns="0" rIns="0" tIns="0" bIns="0">
+          <a:bodyPr wrap="square" lIns="0" tIns="0" rIns="0" bIns="0" anchor="t">
             <a:spAutoFit/>
           </a:bodyPr>
           <a:lstStyle/>
@@ -4851,7 +4900,7 @@
           <a:noFill/>
         </p:spPr>
         <p:txBody>
-          <a:bodyPr wrap="square" anchor="t" lIns="0" rIns="0" tIns="0" bIns="0">
+          <a:bodyPr wrap="square" lIns="0" tIns="0" rIns="0" bIns="0" anchor="t">
             <a:spAutoFit/>
           </a:bodyPr>
           <a:lstStyle/>
@@ -4890,7 +4939,7 @@
           <a:noFill/>
         </p:spPr>
         <p:txBody>
-          <a:bodyPr wrap="square" anchor="t" lIns="0" rIns="0" tIns="0" bIns="0">
+          <a:bodyPr wrap="square" lIns="0" tIns="0" rIns="0" bIns="0" anchor="t">
             <a:spAutoFit/>
           </a:bodyPr>
           <a:lstStyle/>
@@ -4929,7 +4978,7 @@
           <a:noFill/>
         </p:spPr>
         <p:txBody>
-          <a:bodyPr wrap="square" anchor="t" lIns="0" rIns="0" tIns="0" bIns="0">
+          <a:bodyPr wrap="square" lIns="0" tIns="0" rIns="0" bIns="0" anchor="t">
             <a:spAutoFit/>
           </a:bodyPr>
           <a:lstStyle/>
@@ -4992,6 +5041,7 @@
           <a:lstStyle/>
           <a:p>
             <a:pPr algn="ctr"/>
+            <a:endParaRPr/>
           </a:p>
         </p:txBody>
       </p:sp>
@@ -5036,6 +5086,7 @@
           <a:lstStyle/>
           <a:p>
             <a:pPr algn="ctr"/>
+            <a:endParaRPr/>
           </a:p>
         </p:txBody>
       </p:sp>
@@ -5056,7 +5107,7 @@
           <a:noFill/>
         </p:spPr>
         <p:txBody>
-          <a:bodyPr wrap="square" anchor="t" lIns="0" rIns="0" tIns="0" bIns="0">
+          <a:bodyPr wrap="square" lIns="0" tIns="0" rIns="0" bIns="0" anchor="t">
             <a:spAutoFit/>
           </a:bodyPr>
           <a:lstStyle/>
@@ -5095,7 +5146,7 @@
           <a:noFill/>
         </p:spPr>
         <p:txBody>
-          <a:bodyPr wrap="square" anchor="t" lIns="0" rIns="0" tIns="0" bIns="0">
+          <a:bodyPr wrap="square" lIns="0" tIns="0" rIns="0" bIns="0" anchor="t">
             <a:spAutoFit/>
           </a:bodyPr>
           <a:lstStyle/>
@@ -5134,7 +5185,7 @@
           <a:noFill/>
         </p:spPr>
         <p:txBody>
-          <a:bodyPr wrap="square" anchor="t" lIns="0" rIns="0" tIns="0" bIns="0">
+          <a:bodyPr wrap="square" lIns="0" tIns="0" rIns="0" bIns="0" anchor="t">
             <a:spAutoFit/>
           </a:bodyPr>
           <a:lstStyle/>
@@ -5173,7 +5224,7 @@
           <a:noFill/>
         </p:spPr>
         <p:txBody>
-          <a:bodyPr wrap="square" anchor="t" lIns="0" rIns="0" tIns="0" bIns="0">
+          <a:bodyPr wrap="square" lIns="0" tIns="0" rIns="0" bIns="0" anchor="t">
             <a:spAutoFit/>
           </a:bodyPr>
           <a:lstStyle/>
@@ -5236,6 +5287,7 @@
           <a:lstStyle/>
           <a:p>
             <a:pPr algn="ctr"/>
+            <a:endParaRPr/>
           </a:p>
         </p:txBody>
       </p:sp>
@@ -5280,6 +5332,7 @@
           <a:lstStyle/>
           <a:p>
             <a:pPr algn="ctr"/>
+            <a:endParaRPr/>
           </a:p>
         </p:txBody>
       </p:sp>
@@ -5300,7 +5353,7 @@
           <a:noFill/>
         </p:spPr>
         <p:txBody>
-          <a:bodyPr wrap="square" anchor="t" lIns="0" rIns="0" tIns="0" bIns="0">
+          <a:bodyPr wrap="square" lIns="0" tIns="0" rIns="0" bIns="0" anchor="t">
             <a:spAutoFit/>
           </a:bodyPr>
           <a:lstStyle/>
@@ -5339,7 +5392,7 @@
           <a:noFill/>
         </p:spPr>
         <p:txBody>
-          <a:bodyPr wrap="square" anchor="t" lIns="0" rIns="0" tIns="0" bIns="0">
+          <a:bodyPr wrap="square" lIns="0" tIns="0" rIns="0" bIns="0" anchor="t">
             <a:spAutoFit/>
           </a:bodyPr>
           <a:lstStyle/>
@@ -5378,7 +5431,7 @@
           <a:noFill/>
         </p:spPr>
         <p:txBody>
-          <a:bodyPr wrap="square" anchor="t" lIns="0" rIns="0" tIns="0" bIns="0">
+          <a:bodyPr wrap="square" lIns="0" tIns="0" rIns="0" bIns="0" anchor="t">
             <a:spAutoFit/>
           </a:bodyPr>
           <a:lstStyle/>
@@ -5417,7 +5470,7 @@
           <a:noFill/>
         </p:spPr>
         <p:txBody>
-          <a:bodyPr wrap="square" anchor="t" lIns="0" rIns="0" tIns="0" bIns="0">
+          <a:bodyPr wrap="square" lIns="0" tIns="0" rIns="0" bIns="0" anchor="t">
             <a:spAutoFit/>
           </a:bodyPr>
           <a:lstStyle/>
@@ -5480,6 +5533,7 @@
           <a:lstStyle/>
           <a:p>
             <a:pPr algn="ctr"/>
+            <a:endParaRPr/>
           </a:p>
         </p:txBody>
       </p:sp>
@@ -5524,6 +5578,7 @@
           <a:lstStyle/>
           <a:p>
             <a:pPr algn="ctr"/>
+            <a:endParaRPr/>
           </a:p>
         </p:txBody>
       </p:sp>
@@ -5544,7 +5599,7 @@
           <a:noFill/>
         </p:spPr>
         <p:txBody>
-          <a:bodyPr wrap="square" anchor="t" lIns="0" rIns="0" tIns="0" bIns="0">
+          <a:bodyPr wrap="square" lIns="0" tIns="0" rIns="0" bIns="0" anchor="t">
             <a:spAutoFit/>
           </a:bodyPr>
           <a:lstStyle/>
@@ -5583,7 +5638,7 @@
           <a:noFill/>
         </p:spPr>
         <p:txBody>
-          <a:bodyPr wrap="square" anchor="t" lIns="0" rIns="0" tIns="0" bIns="0">
+          <a:bodyPr wrap="square" lIns="0" tIns="0" rIns="0" bIns="0" anchor="t">
             <a:spAutoFit/>
           </a:bodyPr>
           <a:lstStyle/>
@@ -5622,7 +5677,7 @@
           <a:noFill/>
         </p:spPr>
         <p:txBody>
-          <a:bodyPr wrap="square" anchor="t" lIns="0" rIns="0" tIns="0" bIns="0">
+          <a:bodyPr wrap="square" lIns="0" tIns="0" rIns="0" bIns="0" anchor="t">
             <a:spAutoFit/>
           </a:bodyPr>
           <a:lstStyle/>
@@ -5661,7 +5716,7 @@
           <a:noFill/>
         </p:spPr>
         <p:txBody>
-          <a:bodyPr wrap="square" anchor="t" lIns="0" rIns="0" tIns="0" bIns="0">
+          <a:bodyPr wrap="square" lIns="0" tIns="0" rIns="0" bIns="0" anchor="t">
             <a:spAutoFit/>
           </a:bodyPr>
           <a:lstStyle/>
@@ -5724,6 +5779,7 @@
           <a:lstStyle/>
           <a:p>
             <a:pPr algn="ctr"/>
+            <a:endParaRPr/>
           </a:p>
         </p:txBody>
       </p:sp>
@@ -5768,6 +5824,7 @@
           <a:lstStyle/>
           <a:p>
             <a:pPr algn="ctr"/>
+            <a:endParaRPr/>
           </a:p>
         </p:txBody>
       </p:sp>
@@ -5788,7 +5845,7 @@
           <a:noFill/>
         </p:spPr>
         <p:txBody>
-          <a:bodyPr wrap="square" anchor="t" lIns="0" rIns="0" tIns="0" bIns="0">
+          <a:bodyPr wrap="square" lIns="0" tIns="0" rIns="0" bIns="0" anchor="t">
             <a:spAutoFit/>
           </a:bodyPr>
           <a:lstStyle/>
@@ -5827,7 +5884,7 @@
           <a:noFill/>
         </p:spPr>
         <p:txBody>
-          <a:bodyPr wrap="square" anchor="t" lIns="0" rIns="0" tIns="0" bIns="0">
+          <a:bodyPr wrap="square" lIns="0" tIns="0" rIns="0" bIns="0" anchor="t">
             <a:spAutoFit/>
           </a:bodyPr>
           <a:lstStyle/>
@@ -5866,7 +5923,7 @@
           <a:noFill/>
         </p:spPr>
         <p:txBody>
-          <a:bodyPr wrap="square" anchor="t" lIns="0" rIns="0" tIns="0" bIns="0">
+          <a:bodyPr wrap="square" lIns="0" tIns="0" rIns="0" bIns="0" anchor="t">
             <a:spAutoFit/>
           </a:bodyPr>
           <a:lstStyle/>
@@ -5905,7 +5962,7 @@
           <a:noFill/>
         </p:spPr>
         <p:txBody>
-          <a:bodyPr wrap="square" anchor="t" lIns="0" rIns="0" tIns="0" bIns="0">
+          <a:bodyPr wrap="square" lIns="0" tIns="0" rIns="0" bIns="0" anchor="t">
             <a:spAutoFit/>
           </a:bodyPr>
           <a:lstStyle/>
@@ -5968,6 +6025,7 @@
           <a:lstStyle/>
           <a:p>
             <a:pPr algn="ctr"/>
+            <a:endParaRPr/>
           </a:p>
         </p:txBody>
       </p:sp>
@@ -6012,6 +6070,7 @@
           <a:lstStyle/>
           <a:p>
             <a:pPr algn="ctr"/>
+            <a:endParaRPr/>
           </a:p>
         </p:txBody>
       </p:sp>
@@ -6032,7 +6091,7 @@
           <a:noFill/>
         </p:spPr>
         <p:txBody>
-          <a:bodyPr wrap="square" anchor="t" lIns="0" rIns="0" tIns="0" bIns="0">
+          <a:bodyPr wrap="square" lIns="0" tIns="0" rIns="0" bIns="0" anchor="t">
             <a:spAutoFit/>
           </a:bodyPr>
           <a:lstStyle/>
@@ -6071,7 +6130,7 @@
           <a:noFill/>
         </p:spPr>
         <p:txBody>
-          <a:bodyPr wrap="square" anchor="t" lIns="0" rIns="0" tIns="0" bIns="0">
+          <a:bodyPr wrap="square" lIns="0" tIns="0" rIns="0" bIns="0" anchor="t">
             <a:spAutoFit/>
           </a:bodyPr>
           <a:lstStyle/>
@@ -6110,7 +6169,7 @@
           <a:noFill/>
         </p:spPr>
         <p:txBody>
-          <a:bodyPr wrap="square" anchor="t" lIns="0" rIns="0" tIns="0" bIns="0">
+          <a:bodyPr wrap="square" lIns="0" tIns="0" rIns="0" bIns="0" anchor="t">
             <a:spAutoFit/>
           </a:bodyPr>
           <a:lstStyle/>
@@ -6149,7 +6208,7 @@
           <a:noFill/>
         </p:spPr>
         <p:txBody>
-          <a:bodyPr wrap="square" anchor="t" lIns="0" rIns="0" tIns="0" bIns="0">
+          <a:bodyPr wrap="square" lIns="0" tIns="0" rIns="0" bIns="0" anchor="t">
             <a:spAutoFit/>
           </a:bodyPr>
           <a:lstStyle/>
@@ -6212,6 +6271,7 @@
           <a:lstStyle/>
           <a:p>
             <a:pPr algn="ctr"/>
+            <a:endParaRPr/>
           </a:p>
         </p:txBody>
       </p:sp>
@@ -6256,6 +6316,7 @@
           <a:lstStyle/>
           <a:p>
             <a:pPr algn="ctr"/>
+            <a:endParaRPr/>
           </a:p>
         </p:txBody>
       </p:sp>
@@ -6276,7 +6337,7 @@
           <a:noFill/>
         </p:spPr>
         <p:txBody>
-          <a:bodyPr wrap="square" anchor="t" lIns="0" rIns="0" tIns="0" bIns="0">
+          <a:bodyPr wrap="square" lIns="0" tIns="0" rIns="0" bIns="0" anchor="t">
             <a:spAutoFit/>
           </a:bodyPr>
           <a:lstStyle/>
@@ -6315,7 +6376,7 @@
           <a:noFill/>
         </p:spPr>
         <p:txBody>
-          <a:bodyPr wrap="square" anchor="t" lIns="0" rIns="0" tIns="0" bIns="0">
+          <a:bodyPr wrap="square" lIns="0" tIns="0" rIns="0" bIns="0" anchor="t">
             <a:spAutoFit/>
           </a:bodyPr>
           <a:lstStyle/>
@@ -6354,7 +6415,7 @@
           <a:noFill/>
         </p:spPr>
         <p:txBody>
-          <a:bodyPr wrap="square" anchor="t" lIns="0" rIns="0" tIns="0" bIns="0">
+          <a:bodyPr wrap="square" lIns="0" tIns="0" rIns="0" bIns="0" anchor="t">
             <a:spAutoFit/>
           </a:bodyPr>
           <a:lstStyle/>
@@ -6393,7 +6454,7 @@
           <a:noFill/>
         </p:spPr>
         <p:txBody>
-          <a:bodyPr wrap="square" anchor="t" lIns="0" rIns="0" tIns="0" bIns="0">
+          <a:bodyPr wrap="square" lIns="0" tIns="0" rIns="0" bIns="0" anchor="t">
             <a:spAutoFit/>
           </a:bodyPr>
           <a:lstStyle/>
@@ -6432,7 +6493,7 @@
           <a:noFill/>
         </p:spPr>
         <p:txBody>
-          <a:bodyPr wrap="square" anchor="t" lIns="0" rIns="0" tIns="0" bIns="0">
+          <a:bodyPr wrap="square" lIns="0" tIns="0" rIns="0" bIns="0" anchor="t">
             <a:spAutoFit/>
           </a:bodyPr>
           <a:lstStyle/>
@@ -6471,7 +6532,7 @@
           <a:noFill/>
         </p:spPr>
         <p:txBody>
-          <a:bodyPr wrap="square" anchor="t" lIns="0" rIns="0" tIns="0" bIns="0">
+          <a:bodyPr wrap="square" lIns="0" tIns="0" rIns="0" bIns="0" anchor="t">
             <a:spAutoFit/>
           </a:bodyPr>
           <a:lstStyle/>
@@ -6510,7 +6571,7 @@
           <a:noFill/>
         </p:spPr>
         <p:txBody>
-          <a:bodyPr wrap="square" anchor="t" lIns="0" rIns="0" tIns="0" bIns="0">
+          <a:bodyPr wrap="square" lIns="0" tIns="0" rIns="0" bIns="0" anchor="t">
             <a:spAutoFit/>
           </a:bodyPr>
           <a:lstStyle/>
@@ -6541,7 +6602,7 @@
 </file>
 
 <file path=ppt/slides/slide3.xml><?xml version="1.0" encoding="utf-8"?>
-<p:sld xmlns:a="http://schemas.openxmlformats.org/drawingml/2006/main" xmlns:p="http://schemas.openxmlformats.org/presentationml/2006/main" xmlns:r="http://schemas.openxmlformats.org/officeDocument/2006/relationships">
+<p:sld xmlns:a="http://schemas.openxmlformats.org/drawingml/2006/main" xmlns:r="http://schemas.openxmlformats.org/officeDocument/2006/relationships" xmlns:p="http://schemas.openxmlformats.org/presentationml/2006/main">
   <p:cSld>
     <p:spTree>
       <p:nvGrpSpPr>
@@ -6549,7 +6610,14 @@
         <p:cNvGrpSpPr/>
         <p:nvPr/>
       </p:nvGrpSpPr>
-      <p:grpSpPr/>
+      <p:grpSpPr>
+        <a:xfrm>
+          <a:off x="0" y="0"/>
+          <a:ext cx="0" cy="0"/>
+          <a:chOff x="0" y="0"/>
+          <a:chExt cx="0" cy="0"/>
+        </a:xfrm>
+      </p:grpSpPr>
       <p:sp>
         <p:nvSpPr>
           <p:cNvPr id="2" name="Rectangle 1"/>
@@ -6591,6 +6659,7 @@
           <a:lstStyle/>
           <a:p>
             <a:pPr algn="ctr"/>
+            <a:endParaRPr/>
           </a:p>
         </p:txBody>
       </p:sp>
@@ -6611,7 +6680,7 @@
           <a:noFill/>
         </p:spPr>
         <p:txBody>
-          <a:bodyPr wrap="square" anchor="t" lIns="0" rIns="0" tIns="0" bIns="0">
+          <a:bodyPr wrap="square" lIns="0" tIns="0" rIns="0" bIns="0" anchor="t">
             <a:spAutoFit/>
           </a:bodyPr>
           <a:lstStyle/>
@@ -6650,7 +6719,7 @@
           <a:noFill/>
         </p:spPr>
         <p:txBody>
-          <a:bodyPr wrap="square" anchor="t" lIns="0" rIns="0" tIns="0" bIns="0">
+          <a:bodyPr wrap="square" lIns="0" tIns="0" rIns="0" bIns="0" anchor="t">
             <a:spAutoFit/>
           </a:bodyPr>
           <a:lstStyle/>
@@ -6713,6 +6782,7 @@
           <a:lstStyle/>
           <a:p>
             <a:pPr algn="ctr"/>
+            <a:endParaRPr/>
           </a:p>
         </p:txBody>
       </p:sp>
@@ -6733,7 +6803,7 @@
           <a:noFill/>
         </p:spPr>
         <p:txBody>
-          <a:bodyPr wrap="square" anchor="t" lIns="0" rIns="0" tIns="0" bIns="0">
+          <a:bodyPr wrap="square" lIns="0" tIns="0" rIns="0" bIns="0" anchor="t">
             <a:spAutoFit/>
           </a:bodyPr>
           <a:lstStyle/>
@@ -6796,6 +6866,7 @@
           <a:lstStyle/>
           <a:p>
             <a:pPr algn="ctr"/>
+            <a:endParaRPr/>
           </a:p>
         </p:txBody>
       </p:sp>
@@ -6840,6 +6911,7 @@
           <a:lstStyle/>
           <a:p>
             <a:pPr algn="ctr"/>
+            <a:endParaRPr/>
           </a:p>
         </p:txBody>
       </p:sp>
@@ -6860,7 +6932,7 @@
           <a:noFill/>
         </p:spPr>
         <p:txBody>
-          <a:bodyPr wrap="square" anchor="t" lIns="0" rIns="0" tIns="0" bIns="0">
+          <a:bodyPr wrap="square" lIns="0" tIns="0" rIns="0" bIns="0" anchor="t">
             <a:spAutoFit/>
           </a:bodyPr>
           <a:lstStyle/>
@@ -6871,7 +6943,7 @@
               </a:spcAft>
             </a:pPr>
             <a:r>
-              <a:rPr sz="1300" b="1">
+              <a:rPr sz="1300" b="1" dirty="0">
                 <a:solidFill>
                   <a:srgbClr val="003654"/>
                 </a:solidFill>
@@ -6887,7 +6959,7 @@
               </a:spcAft>
             </a:pPr>
             <a:r>
-              <a:rPr sz="1050" b="0">
+              <a:rPr sz="1050" b="0" dirty="0">
                 <a:solidFill>
                   <a:srgbClr val="1A1A1A"/>
                 </a:solidFill>
@@ -6903,7 +6975,7 @@
               </a:spcAft>
             </a:pPr>
             <a:r>
-              <a:rPr sz="1050" b="0">
+              <a:rPr sz="1050" b="0" dirty="0">
                 <a:solidFill>
                   <a:srgbClr val="1A1A1A"/>
                 </a:solidFill>
@@ -6919,7 +6991,7 @@
               </a:spcAft>
             </a:pPr>
             <a:r>
-              <a:rPr sz="1050" b="0">
+              <a:rPr sz="1050" b="0" dirty="0">
                 <a:solidFill>
                   <a:srgbClr val="1A1A1A"/>
                 </a:solidFill>
@@ -6971,6 +7043,7 @@
           <a:lstStyle/>
           <a:p>
             <a:pPr algn="ctr"/>
+            <a:endParaRPr/>
           </a:p>
         </p:txBody>
       </p:sp>
@@ -7015,6 +7088,7 @@
           <a:lstStyle/>
           <a:p>
             <a:pPr algn="ctr"/>
+            <a:endParaRPr/>
           </a:p>
         </p:txBody>
       </p:sp>
@@ -7035,7 +7109,7 @@
           <a:noFill/>
         </p:spPr>
         <p:txBody>
-          <a:bodyPr wrap="square" anchor="t" lIns="0" rIns="0" tIns="0" bIns="0">
+          <a:bodyPr wrap="square" lIns="0" tIns="0" rIns="0" bIns="0" anchor="t">
             <a:spAutoFit/>
           </a:bodyPr>
           <a:lstStyle/>
@@ -7046,7 +7120,7 @@
               </a:spcAft>
             </a:pPr>
             <a:r>
-              <a:rPr sz="1300" b="1">
+              <a:rPr sz="1300" b="1" dirty="0">
                 <a:solidFill>
                   <a:srgbClr val="003654"/>
                 </a:solidFill>
@@ -7062,7 +7136,7 @@
               </a:spcAft>
             </a:pPr>
             <a:r>
-              <a:rPr sz="1050" b="0">
+              <a:rPr sz="1050" b="0" dirty="0">
                 <a:solidFill>
                   <a:srgbClr val="1A1A1A"/>
                 </a:solidFill>
@@ -7078,7 +7152,7 @@
               </a:spcAft>
             </a:pPr>
             <a:r>
-              <a:rPr sz="1050" b="0">
+              <a:rPr sz="1050" b="0" dirty="0">
                 <a:solidFill>
                   <a:srgbClr val="1A1A1A"/>
                 </a:solidFill>
@@ -7094,7 +7168,7 @@
               </a:spcAft>
             </a:pPr>
             <a:r>
-              <a:rPr sz="1050" b="0">
+              <a:rPr sz="1050" b="0" dirty="0">
                 <a:solidFill>
                   <a:srgbClr val="1A1A1A"/>
                 </a:solidFill>
@@ -7146,6 +7220,7 @@
           <a:lstStyle/>
           <a:p>
             <a:pPr algn="ctr"/>
+            <a:endParaRPr dirty="0"/>
           </a:p>
         </p:txBody>
       </p:sp>
@@ -7190,6 +7265,7 @@
           <a:lstStyle/>
           <a:p>
             <a:pPr algn="ctr"/>
+            <a:endParaRPr/>
           </a:p>
         </p:txBody>
       </p:sp>
@@ -7210,7 +7286,7 @@
           <a:noFill/>
         </p:spPr>
         <p:txBody>
-          <a:bodyPr wrap="square" anchor="t" lIns="0" rIns="0" tIns="0" bIns="0">
+          <a:bodyPr wrap="square" lIns="0" tIns="0" rIns="0" bIns="0" anchor="t">
             <a:spAutoFit/>
           </a:bodyPr>
           <a:lstStyle/>
@@ -7221,7 +7297,7 @@
               </a:spcAft>
             </a:pPr>
             <a:r>
-              <a:rPr sz="1300" b="1">
+              <a:rPr sz="1300" b="1" dirty="0">
                 <a:solidFill>
                   <a:srgbClr val="003654"/>
                 </a:solidFill>
@@ -7237,7 +7313,7 @@
               </a:spcAft>
             </a:pPr>
             <a:r>
-              <a:rPr sz="1050" b="0">
+              <a:rPr sz="1050" b="0" dirty="0">
                 <a:solidFill>
                   <a:srgbClr val="1A1A1A"/>
                 </a:solidFill>
@@ -7253,7 +7329,7 @@
               </a:spcAft>
             </a:pPr>
             <a:r>
-              <a:rPr sz="1050" b="0">
+              <a:rPr sz="1050" b="0" dirty="0">
                 <a:solidFill>
                   <a:srgbClr val="1A1A1A"/>
                 </a:solidFill>
@@ -7269,7 +7345,7 @@
               </a:spcAft>
             </a:pPr>
             <a:r>
-              <a:rPr sz="1050" b="0">
+              <a:rPr sz="1050" b="0" dirty="0">
                 <a:solidFill>
                   <a:srgbClr val="1A1A1A"/>
                 </a:solidFill>
@@ -7323,6 +7399,7 @@
           <a:lstStyle/>
           <a:p>
             <a:pPr algn="ctr"/>
+            <a:endParaRPr/>
           </a:p>
         </p:txBody>
       </p:sp>
@@ -7343,7 +7420,7 @@
           <a:noFill/>
         </p:spPr>
         <p:txBody>
-          <a:bodyPr wrap="square" anchor="t" lIns="0" rIns="0" tIns="0" bIns="0">
+          <a:bodyPr wrap="square" lIns="0" tIns="0" rIns="0" bIns="0" anchor="t">
             <a:spAutoFit/>
           </a:bodyPr>
           <a:lstStyle/>
@@ -7398,7 +7475,7 @@
           <a:noFill/>
         </p:spPr>
         <p:txBody>
-          <a:bodyPr wrap="square" anchor="t" lIns="0" rIns="0" tIns="0" bIns="0">
+          <a:bodyPr wrap="square" lIns="0" tIns="0" rIns="0" bIns="0" anchor="t">
             <a:spAutoFit/>
           </a:bodyPr>
           <a:lstStyle/>
@@ -7437,7 +7514,7 @@
           <a:noFill/>
         </p:spPr>
         <p:txBody>
-          <a:bodyPr wrap="square" anchor="t" lIns="0" rIns="0" tIns="0" bIns="0">
+          <a:bodyPr wrap="square" lIns="0" tIns="0" rIns="0" bIns="0" anchor="t">
             <a:spAutoFit/>
           </a:bodyPr>
           <a:lstStyle/>
@@ -7468,7 +7545,7 @@
 </file>
 
 <file path=ppt/slides/slide4.xml><?xml version="1.0" encoding="utf-8"?>
-<p:sld xmlns:a="http://schemas.openxmlformats.org/drawingml/2006/main" xmlns:p="http://schemas.openxmlformats.org/presentationml/2006/main" xmlns:r="http://schemas.openxmlformats.org/officeDocument/2006/relationships">
+<p:sld xmlns:a="http://schemas.openxmlformats.org/drawingml/2006/main" xmlns:r="http://schemas.openxmlformats.org/officeDocument/2006/relationships" xmlns:p="http://schemas.openxmlformats.org/presentationml/2006/main">
   <p:cSld>
     <p:spTree>
       <p:nvGrpSpPr>
@@ -7476,7 +7553,14 @@
         <p:cNvGrpSpPr/>
         <p:nvPr/>
       </p:nvGrpSpPr>
-      <p:grpSpPr/>
+      <p:grpSpPr>
+        <a:xfrm>
+          <a:off x="0" y="0"/>
+          <a:ext cx="0" cy="0"/>
+          <a:chOff x="0" y="0"/>
+          <a:chExt cx="0" cy="0"/>
+        </a:xfrm>
+      </p:grpSpPr>
       <p:sp>
         <p:nvSpPr>
           <p:cNvPr id="2" name="Rectangle 1"/>
@@ -7518,6 +7602,7 @@
           <a:lstStyle/>
           <a:p>
             <a:pPr algn="ctr"/>
+            <a:endParaRPr/>
           </a:p>
         </p:txBody>
       </p:sp>
@@ -7538,7 +7623,7 @@
           <a:noFill/>
         </p:spPr>
         <p:txBody>
-          <a:bodyPr wrap="square" anchor="t" lIns="0" rIns="0" tIns="0" bIns="0">
+          <a:bodyPr wrap="square" lIns="0" tIns="0" rIns="0" bIns="0" anchor="t">
             <a:spAutoFit/>
           </a:bodyPr>
           <a:lstStyle/>
@@ -7577,7 +7662,7 @@
           <a:noFill/>
         </p:spPr>
         <p:txBody>
-          <a:bodyPr wrap="square" anchor="t" lIns="0" rIns="0" tIns="0" bIns="0">
+          <a:bodyPr wrap="square" lIns="0" tIns="0" rIns="0" bIns="0" anchor="t">
             <a:spAutoFit/>
           </a:bodyPr>
           <a:lstStyle/>
@@ -7640,6 +7725,7 @@
           <a:lstStyle/>
           <a:p>
             <a:pPr algn="ctr"/>
+            <a:endParaRPr/>
           </a:p>
         </p:txBody>
       </p:sp>
@@ -7660,7 +7746,7 @@
           <a:noFill/>
         </p:spPr>
         <p:txBody>
-          <a:bodyPr wrap="square" anchor="t" lIns="0" rIns="0" tIns="0" bIns="0">
+          <a:bodyPr wrap="square" lIns="0" tIns="0" rIns="0" bIns="0" anchor="t">
             <a:spAutoFit/>
           </a:bodyPr>
           <a:lstStyle/>
@@ -7725,6 +7811,7 @@
           <a:lstStyle/>
           <a:p>
             <a:pPr algn="ctr"/>
+            <a:endParaRPr/>
           </a:p>
         </p:txBody>
       </p:sp>
@@ -7769,6 +7856,7 @@
           <a:lstStyle/>
           <a:p>
             <a:pPr algn="ctr"/>
+            <a:endParaRPr/>
           </a:p>
         </p:txBody>
       </p:sp>
@@ -7789,7 +7877,7 @@
           <a:noFill/>
         </p:spPr>
         <p:txBody>
-          <a:bodyPr wrap="square" anchor="t" lIns="0" rIns="0" tIns="0" bIns="0">
+          <a:bodyPr wrap="square" lIns="0" tIns="0" rIns="0" bIns="0" anchor="t">
             <a:spAutoFit/>
           </a:bodyPr>
           <a:lstStyle/>
@@ -7828,7 +7916,7 @@
           <a:noFill/>
         </p:spPr>
         <p:txBody>
-          <a:bodyPr wrap="square" anchor="t" lIns="0" rIns="0" tIns="0" bIns="0">
+          <a:bodyPr wrap="square" lIns="0" tIns="0" rIns="0" bIns="0" anchor="t">
             <a:spAutoFit/>
           </a:bodyPr>
           <a:lstStyle/>
@@ -7925,6 +8013,7 @@
           <a:lstStyle/>
           <a:p>
             <a:pPr algn="ctr"/>
+            <a:endParaRPr/>
           </a:p>
         </p:txBody>
       </p:sp>
@@ -7969,6 +8058,7 @@
           <a:lstStyle/>
           <a:p>
             <a:pPr algn="ctr"/>
+            <a:endParaRPr/>
           </a:p>
         </p:txBody>
       </p:sp>
@@ -7989,7 +8079,7 @@
           <a:noFill/>
         </p:spPr>
         <p:txBody>
-          <a:bodyPr wrap="square" anchor="t" lIns="0" rIns="0" tIns="0" bIns="0">
+          <a:bodyPr wrap="square" lIns="0" tIns="0" rIns="0" bIns="0" anchor="t">
             <a:spAutoFit/>
           </a:bodyPr>
           <a:lstStyle/>
@@ -8028,7 +8118,7 @@
           <a:noFill/>
         </p:spPr>
         <p:txBody>
-          <a:bodyPr wrap="square" anchor="t" lIns="0" rIns="0" tIns="0" bIns="0">
+          <a:bodyPr wrap="square" lIns="0" tIns="0" rIns="0" bIns="0" anchor="t">
             <a:spAutoFit/>
           </a:bodyPr>
           <a:lstStyle/>
@@ -8125,6 +8215,7 @@
           <a:lstStyle/>
           <a:p>
             <a:pPr algn="ctr"/>
+            <a:endParaRPr/>
           </a:p>
         </p:txBody>
       </p:sp>
@@ -8169,6 +8260,7 @@
           <a:lstStyle/>
           <a:p>
             <a:pPr algn="ctr"/>
+            <a:endParaRPr/>
           </a:p>
         </p:txBody>
       </p:sp>
@@ -8189,7 +8281,7 @@
           <a:noFill/>
         </p:spPr>
         <p:txBody>
-          <a:bodyPr wrap="square" anchor="t" lIns="0" rIns="0" tIns="0" bIns="0">
+          <a:bodyPr wrap="square" lIns="0" tIns="0" rIns="0" bIns="0" anchor="t">
             <a:spAutoFit/>
           </a:bodyPr>
           <a:lstStyle/>
@@ -8228,7 +8320,7 @@
           <a:noFill/>
         </p:spPr>
         <p:txBody>
-          <a:bodyPr wrap="square" anchor="t" lIns="0" rIns="0" tIns="0" bIns="0">
+          <a:bodyPr wrap="square" lIns="0" tIns="0" rIns="0" bIns="0" anchor="t">
             <a:spAutoFit/>
           </a:bodyPr>
           <a:lstStyle/>
@@ -8323,6 +8415,7 @@
           <a:lstStyle/>
           <a:p>
             <a:pPr algn="ctr"/>
+            <a:endParaRPr/>
           </a:p>
         </p:txBody>
       </p:sp>
@@ -8343,7 +8436,7 @@
           <a:noFill/>
         </p:spPr>
         <p:txBody>
-          <a:bodyPr wrap="square" anchor="t" lIns="0" rIns="0" tIns="0" bIns="0">
+          <a:bodyPr wrap="square" lIns="0" tIns="0" rIns="0" bIns="0" anchor="t">
             <a:spAutoFit/>
           </a:bodyPr>
           <a:lstStyle/>
@@ -8398,7 +8491,7 @@
           <a:noFill/>
         </p:spPr>
         <p:txBody>
-          <a:bodyPr wrap="square" anchor="t" lIns="0" rIns="0" tIns="0" bIns="0">
+          <a:bodyPr wrap="square" lIns="0" tIns="0" rIns="0" bIns="0" anchor="t">
             <a:spAutoFit/>
           </a:bodyPr>
           <a:lstStyle/>
@@ -8437,7 +8530,7 @@
           <a:noFill/>
         </p:spPr>
         <p:txBody>
-          <a:bodyPr wrap="square" anchor="t" lIns="0" rIns="0" tIns="0" bIns="0">
+          <a:bodyPr wrap="square" lIns="0" tIns="0" rIns="0" bIns="0" anchor="t">
             <a:spAutoFit/>
           </a:bodyPr>
           <a:lstStyle/>
